--- a/情報論2_2025.pptx
+++ b/情報論2_2025.pptx
@@ -284,7 +284,7 @@
           <a:p>
             <a:fld id="{9854E857-21D8-D348-91A9-994C9AAD514D}" type="datetimeFigureOut">
               <a:rPr kumimoji="1" lang="ja-JP" altLang="en-US" smtClean="0"/>
-              <a:t>2024/4/14</a:t>
+              <a:t>2025/4/16</a:t>
             </a:fld>
             <a:endParaRPr kumimoji="1" lang="ja-JP" altLang="en-US"/>
           </a:p>
@@ -514,7 +514,7 @@
           <a:p>
             <a:fld id="{9854E857-21D8-D348-91A9-994C9AAD514D}" type="datetimeFigureOut">
               <a:rPr kumimoji="1" lang="ja-JP" altLang="en-US" smtClean="0"/>
-              <a:t>2024/4/14</a:t>
+              <a:t>2025/4/16</a:t>
             </a:fld>
             <a:endParaRPr kumimoji="1" lang="ja-JP" altLang="en-US"/>
           </a:p>
@@ -754,7 +754,7 @@
           <a:p>
             <a:fld id="{9854E857-21D8-D348-91A9-994C9AAD514D}" type="datetimeFigureOut">
               <a:rPr kumimoji="1" lang="ja-JP" altLang="en-US" smtClean="0"/>
-              <a:t>2024/4/14</a:t>
+              <a:t>2025/4/16</a:t>
             </a:fld>
             <a:endParaRPr kumimoji="1" lang="ja-JP" altLang="en-US"/>
           </a:p>
@@ -984,7 +984,7 @@
           <a:p>
             <a:fld id="{9854E857-21D8-D348-91A9-994C9AAD514D}" type="datetimeFigureOut">
               <a:rPr kumimoji="1" lang="ja-JP" altLang="en-US" smtClean="0"/>
-              <a:t>2024/4/14</a:t>
+              <a:t>2025/4/16</a:t>
             </a:fld>
             <a:endParaRPr kumimoji="1" lang="ja-JP" altLang="en-US"/>
           </a:p>
@@ -1259,7 +1259,7 @@
           <a:p>
             <a:fld id="{9854E857-21D8-D348-91A9-994C9AAD514D}" type="datetimeFigureOut">
               <a:rPr kumimoji="1" lang="ja-JP" altLang="en-US" smtClean="0"/>
-              <a:t>2024/4/14</a:t>
+              <a:t>2025/4/16</a:t>
             </a:fld>
             <a:endParaRPr kumimoji="1" lang="ja-JP" altLang="en-US"/>
           </a:p>
@@ -1588,7 +1588,7 @@
           <a:p>
             <a:fld id="{9854E857-21D8-D348-91A9-994C9AAD514D}" type="datetimeFigureOut">
               <a:rPr kumimoji="1" lang="ja-JP" altLang="en-US" smtClean="0"/>
-              <a:t>2024/4/14</a:t>
+              <a:t>2025/4/16</a:t>
             </a:fld>
             <a:endParaRPr kumimoji="1" lang="ja-JP" altLang="en-US"/>
           </a:p>
@@ -2064,7 +2064,7 @@
           <a:p>
             <a:fld id="{9854E857-21D8-D348-91A9-994C9AAD514D}" type="datetimeFigureOut">
               <a:rPr kumimoji="1" lang="ja-JP" altLang="en-US" smtClean="0"/>
-              <a:t>2024/4/14</a:t>
+              <a:t>2025/4/16</a:t>
             </a:fld>
             <a:endParaRPr kumimoji="1" lang="ja-JP" altLang="en-US"/>
           </a:p>
@@ -2205,7 +2205,7 @@
           <a:p>
             <a:fld id="{9854E857-21D8-D348-91A9-994C9AAD514D}" type="datetimeFigureOut">
               <a:rPr kumimoji="1" lang="ja-JP" altLang="en-US" smtClean="0"/>
-              <a:t>2024/4/14</a:t>
+              <a:t>2025/4/16</a:t>
             </a:fld>
             <a:endParaRPr kumimoji="1" lang="ja-JP" altLang="en-US"/>
           </a:p>
@@ -2318,7 +2318,7 @@
           <a:p>
             <a:fld id="{9854E857-21D8-D348-91A9-994C9AAD514D}" type="datetimeFigureOut">
               <a:rPr kumimoji="1" lang="ja-JP" altLang="en-US" smtClean="0"/>
-              <a:t>2024/4/14</a:t>
+              <a:t>2025/4/16</a:t>
             </a:fld>
             <a:endParaRPr kumimoji="1" lang="ja-JP" altLang="en-US"/>
           </a:p>
@@ -2661,7 +2661,7 @@
           <a:p>
             <a:fld id="{9854E857-21D8-D348-91A9-994C9AAD514D}" type="datetimeFigureOut">
               <a:rPr kumimoji="1" lang="ja-JP" altLang="en-US" smtClean="0"/>
-              <a:t>2024/4/14</a:t>
+              <a:t>2025/4/16</a:t>
             </a:fld>
             <a:endParaRPr kumimoji="1" lang="ja-JP" altLang="en-US"/>
           </a:p>
@@ -2949,7 +2949,7 @@
           <a:p>
             <a:fld id="{9854E857-21D8-D348-91A9-994C9AAD514D}" type="datetimeFigureOut">
               <a:rPr kumimoji="1" lang="ja-JP" altLang="en-US" smtClean="0"/>
-              <a:t>2024/4/14</a:t>
+              <a:t>2025/4/16</a:t>
             </a:fld>
             <a:endParaRPr kumimoji="1" lang="ja-JP" altLang="en-US"/>
           </a:p>
@@ -3222,7 +3222,7 @@
           <a:p>
             <a:fld id="{9854E857-21D8-D348-91A9-994C9AAD514D}" type="datetimeFigureOut">
               <a:rPr kumimoji="1" lang="ja-JP" altLang="en-US" smtClean="0"/>
-              <a:t>2024/4/14</a:t>
+              <a:t>2025/4/16</a:t>
             </a:fld>
             <a:endParaRPr kumimoji="1" lang="ja-JP" altLang="en-US"/>
           </a:p>
